--- a/docs/NLR_MEETING_2026-06-10_DECK.pptx
+++ b/docs/NLR_MEETING_2026-06-10_DECK.pptx
@@ -1322,6 +1322,31 @@
         <p:spPr>
           <a:xfrm>
             <a:off x="0" y="0"/>
+            <a:ext cx="12191695" cy="6858000"/>
+          </a:xfrm>
+          <a:prstGeom prst="rect">
+            <a:avLst/>
+          </a:prstGeom>
+          <a:solidFill>
+            <a:srgbClr val="0F172A"/>
+          </a:solidFill>
+          <a:ln w="12700">
+            <a:solidFill>
+              <a:srgbClr val="0F172A"/>
+            </a:solidFill>
+            <a:prstDash val="solid"/>
+          </a:ln>
+        </p:spPr>
+      </p:sp>
+      <p:sp>
+        <p:nvSpPr>
+          <p:cNvPr id="3" name="Shape 1"/>
+          <p:cNvSpPr/>
+          <p:nvPr/>
+        </p:nvSpPr>
+        <p:spPr>
+          <a:xfrm>
+            <a:off x="0" y="0"/>
             <a:ext cx="320040" cy="6858000"/>
           </a:xfrm>
           <a:prstGeom prst="rect">
@@ -1340,7 +1365,7 @@
       </p:sp>
       <p:sp>
         <p:nvSpPr>
-          <p:cNvPr id="3" name="Text 1"/>
+          <p:cNvPr id="4" name="Text 2"/>
           <p:cNvSpPr/>
           <p:nvPr/>
         </p:nvSpPr>
@@ -1379,14 +1404,14 @@
       </p:sp>
       <p:sp>
         <p:nvSpPr>
-          <p:cNvPr id="4" name="Text 2"/>
-          <p:cNvSpPr/>
-          <p:nvPr/>
-        </p:nvSpPr>
-        <p:spPr>
-          <a:xfrm>
-            <a:off x="914400" y="1783080"/>
-            <a:ext cx="10972800" cy="1280160"/>
+          <p:cNvPr id="5" name="Text 3"/>
+          <p:cNvSpPr/>
+          <p:nvPr/>
+        </p:nvSpPr>
+        <p:spPr>
+          <a:xfrm>
+            <a:off x="914400" y="1691640"/>
+            <a:ext cx="3840480" cy="1280160"/>
           </a:xfrm>
           <a:prstGeom prst="rect">
             <a:avLst/>
@@ -1398,7 +1423,7 @@
           <a:bodyPr wrap="square" rtlCol="0" anchor="t"/>
           <a:lstStyle/>
           <a:p>
-            <a:pPr indent="0" marL="0">
+            <a:pPr algn="l" indent="0" marL="0">
               <a:buNone/>
             </a:pPr>
             <a:r>
@@ -1412,7 +1437,32 @@
               </a:rPr>
               <a:t>DC Hub</a:t>
             </a:r>
-            <a:pPr indent="0" marL="0">
+            <a:endParaRPr lang="en-US" sz="6400" dirty="0"/>
+          </a:p>
+        </p:txBody>
+      </p:sp>
+      <p:sp>
+        <p:nvSpPr>
+          <p:cNvPr id="6" name="Text 4"/>
+          <p:cNvSpPr/>
+          <p:nvPr/>
+        </p:nvSpPr>
+        <p:spPr>
+          <a:xfrm>
+            <a:off x="4754880" y="1783080"/>
+            <a:ext cx="731520" cy="1188720"/>
+          </a:xfrm>
+          <a:prstGeom prst="rect">
+            <a:avLst/>
+          </a:prstGeom>
+          <a:noFill/>
+          <a:ln/>
+        </p:spPr>
+        <p:txBody>
+          <a:bodyPr wrap="square" rtlCol="0" anchor="t"/>
+          <a:lstStyle/>
+          <a:p>
+            <a:pPr algn="ctr" indent="0" marL="0">
               <a:buNone/>
             </a:pPr>
             <a:r>
@@ -1424,9 +1474,34 @@
                 <a:ea typeface="Calibri" pitchFamily="34" charset="-122"/>
                 <a:cs typeface="Calibri" pitchFamily="34" charset="-120"/>
               </a:rPr>
-              <a:t>  ×  </a:t>
-            </a:r>
-            <a:pPr indent="0" marL="0">
+              <a:t>×</a:t>
+            </a:r>
+            <a:endParaRPr lang="en-US" sz="5200" dirty="0"/>
+          </a:p>
+        </p:txBody>
+      </p:sp>
+      <p:sp>
+        <p:nvSpPr>
+          <p:cNvPr id="7" name="Text 5"/>
+          <p:cNvSpPr/>
+          <p:nvPr/>
+        </p:nvSpPr>
+        <p:spPr>
+          <a:xfrm>
+            <a:off x="5532120" y="1691640"/>
+            <a:ext cx="6400800" cy="1280160"/>
+          </a:xfrm>
+          <a:prstGeom prst="rect">
+            <a:avLst/>
+          </a:prstGeom>
+          <a:noFill/>
+          <a:ln/>
+        </p:spPr>
+        <p:txBody>
+          <a:bodyPr wrap="square" rtlCol="0" anchor="t"/>
+          <a:lstStyle/>
+          <a:p>
+            <a:pPr algn="l" indent="0" marL="0">
               <a:buNone/>
             </a:pPr>
             <a:r>
@@ -1446,7 +1521,7 @@
       </p:sp>
       <p:sp>
         <p:nvSpPr>
-          <p:cNvPr id="5" name="Text 3"/>
+          <p:cNvPr id="8" name="Text 6"/>
           <p:cNvSpPr/>
           <p:nvPr/>
         </p:nvSpPr>
@@ -1485,7 +1560,7 @@
       </p:sp>
       <p:sp>
         <p:nvSpPr>
-          <p:cNvPr id="6" name="Shape 4"/>
+          <p:cNvPr id="9" name="Shape 7"/>
           <p:cNvSpPr/>
           <p:nvPr/>
         </p:nvSpPr>
@@ -1508,7 +1583,7 @@
       </p:sp>
       <p:sp>
         <p:nvSpPr>
-          <p:cNvPr id="7" name="Text 5"/>
+          <p:cNvPr id="10" name="Text 8"/>
           <p:cNvSpPr/>
           <p:nvPr/>
         </p:nvSpPr>
@@ -1547,7 +1622,7 @@
       </p:sp>
       <p:sp>
         <p:nvSpPr>
-          <p:cNvPr id="8" name="Text 6"/>
+          <p:cNvPr id="11" name="Text 9"/>
           <p:cNvSpPr/>
           <p:nvPr/>
         </p:nvSpPr>
@@ -1586,7 +1661,7 @@
       </p:sp>
       <p:sp>
         <p:nvSpPr>
-          <p:cNvPr id="9" name="Text 7"/>
+          <p:cNvPr id="12" name="Text 10"/>
           <p:cNvSpPr/>
           <p:nvPr/>
         </p:nvSpPr>
@@ -1625,7 +1700,7 @@
       </p:sp>
       <p:sp>
         <p:nvSpPr>
-          <p:cNvPr id="10" name="Text 8"/>
+          <p:cNvPr id="13" name="Text 11"/>
           <p:cNvSpPr/>
           <p:nvPr/>
         </p:nvSpPr>
@@ -1695,6 +1770,31 @@
         </p:nvSpPr>
         <p:spPr>
           <a:xfrm>
+            <a:off x="0" y="0"/>
+            <a:ext cx="12191695" cy="6858000"/>
+          </a:xfrm>
+          <a:prstGeom prst="rect">
+            <a:avLst/>
+          </a:prstGeom>
+          <a:solidFill>
+            <a:srgbClr val="0F172A"/>
+          </a:solidFill>
+          <a:ln w="12700">
+            <a:solidFill>
+              <a:srgbClr val="0F172A"/>
+            </a:solidFill>
+            <a:prstDash val="solid"/>
+          </a:ln>
+        </p:spPr>
+      </p:sp>
+      <p:sp>
+        <p:nvSpPr>
+          <p:cNvPr id="3" name="Shape 1"/>
+          <p:cNvSpPr/>
+          <p:nvPr/>
+        </p:nvSpPr>
+        <p:spPr>
+          <a:xfrm>
             <a:off x="457200" y="640080"/>
             <a:ext cx="201168" cy="201168"/>
           </a:xfrm>
@@ -1714,7 +1814,7 @@
       </p:sp>
       <p:sp>
         <p:nvSpPr>
-          <p:cNvPr id="3" name="Text 1"/>
+          <p:cNvPr id="4" name="Text 2"/>
           <p:cNvSpPr/>
           <p:nvPr/>
         </p:nvSpPr>
@@ -1753,7 +1853,7 @@
       </p:sp>
       <p:sp>
         <p:nvSpPr>
-          <p:cNvPr id="4" name="Text 2"/>
+          <p:cNvPr id="5" name="Text 3"/>
           <p:cNvSpPr/>
           <p:nvPr/>
         </p:nvSpPr>
@@ -1792,7 +1892,7 @@
       </p:sp>
       <p:sp>
         <p:nvSpPr>
-          <p:cNvPr id="5" name="Text 3"/>
+          <p:cNvPr id="6" name="Text 4"/>
           <p:cNvSpPr/>
           <p:nvPr/>
         </p:nvSpPr>
@@ -1831,7 +1931,7 @@
       </p:sp>
       <p:sp>
         <p:nvSpPr>
-          <p:cNvPr id="6" name="Text 4"/>
+          <p:cNvPr id="7" name="Text 5"/>
           <p:cNvSpPr/>
           <p:nvPr/>
         </p:nvSpPr>
@@ -1870,7 +1970,7 @@
       </p:sp>
       <p:sp>
         <p:nvSpPr>
-          <p:cNvPr id="7" name="Text 5"/>
+          <p:cNvPr id="8" name="Text 6"/>
           <p:cNvSpPr/>
           <p:nvPr/>
         </p:nvSpPr>
@@ -1909,7 +2009,7 @@
       </p:sp>
       <p:sp>
         <p:nvSpPr>
-          <p:cNvPr id="8" name="Text 6"/>
+          <p:cNvPr id="9" name="Text 7"/>
           <p:cNvSpPr/>
           <p:nvPr/>
         </p:nvSpPr>
@@ -1948,7 +2048,7 @@
       </p:sp>
       <p:sp>
         <p:nvSpPr>
-          <p:cNvPr id="9" name="Text 7"/>
+          <p:cNvPr id="10" name="Text 8"/>
           <p:cNvSpPr/>
           <p:nvPr/>
         </p:nvSpPr>
@@ -1987,7 +2087,7 @@
       </p:sp>
       <p:sp>
         <p:nvSpPr>
-          <p:cNvPr id="10" name="Text 8"/>
+          <p:cNvPr id="11" name="Text 9"/>
           <p:cNvSpPr/>
           <p:nvPr/>
         </p:nvSpPr>
@@ -2026,7 +2126,7 @@
       </p:sp>
       <p:sp>
         <p:nvSpPr>
-          <p:cNvPr id="11" name="Text 9"/>
+          <p:cNvPr id="12" name="Text 10"/>
           <p:cNvSpPr/>
           <p:nvPr/>
         </p:nvSpPr>
@@ -2065,7 +2165,7 @@
       </p:sp>
       <p:sp>
         <p:nvSpPr>
-          <p:cNvPr id="12" name="Text 10"/>
+          <p:cNvPr id="13" name="Text 11"/>
           <p:cNvSpPr/>
           <p:nvPr/>
         </p:nvSpPr>
@@ -2104,7 +2204,7 @@
       </p:sp>
       <p:sp>
         <p:nvSpPr>
-          <p:cNvPr id="13" name="Text 11"/>
+          <p:cNvPr id="14" name="Text 12"/>
           <p:cNvSpPr/>
           <p:nvPr/>
         </p:nvSpPr>
@@ -2143,7 +2243,7 @@
       </p:sp>
       <p:sp>
         <p:nvSpPr>
-          <p:cNvPr id="14" name="Text 12"/>
+          <p:cNvPr id="15" name="Text 13"/>
           <p:cNvSpPr/>
           <p:nvPr/>
         </p:nvSpPr>
@@ -2182,7 +2282,7 @@
       </p:sp>
       <p:sp>
         <p:nvSpPr>
-          <p:cNvPr id="15" name="Text 13"/>
+          <p:cNvPr id="16" name="Text 14"/>
           <p:cNvSpPr/>
           <p:nvPr/>
         </p:nvSpPr>
@@ -2221,7 +2321,7 @@
       </p:sp>
       <p:sp>
         <p:nvSpPr>
-          <p:cNvPr id="16" name="Text 14"/>
+          <p:cNvPr id="17" name="Text 15"/>
           <p:cNvSpPr/>
           <p:nvPr/>
         </p:nvSpPr>
@@ -2260,7 +2360,7 @@
       </p:sp>
       <p:sp>
         <p:nvSpPr>
-          <p:cNvPr id="17" name="Text 15"/>
+          <p:cNvPr id="18" name="Text 16"/>
           <p:cNvSpPr/>
           <p:nvPr/>
         </p:nvSpPr>
@@ -2299,7 +2399,7 @@
       </p:sp>
       <p:sp>
         <p:nvSpPr>
-          <p:cNvPr id="18" name="Text 16"/>
+          <p:cNvPr id="19" name="Text 17"/>
           <p:cNvSpPr/>
           <p:nvPr/>
         </p:nvSpPr>
@@ -2338,7 +2438,7 @@
       </p:sp>
       <p:sp>
         <p:nvSpPr>
-          <p:cNvPr id="19" name="Text 17"/>
+          <p:cNvPr id="20" name="Text 18"/>
           <p:cNvSpPr/>
           <p:nvPr/>
         </p:nvSpPr>
@@ -2377,7 +2477,7 @@
       </p:sp>
       <p:sp>
         <p:nvSpPr>
-          <p:cNvPr id="20" name="Text 18"/>
+          <p:cNvPr id="21" name="Text 19"/>
           <p:cNvSpPr/>
           <p:nvPr/>
         </p:nvSpPr>
@@ -2416,7 +2516,7 @@
       </p:sp>
       <p:sp>
         <p:nvSpPr>
-          <p:cNvPr id="21" name="Text 19"/>
+          <p:cNvPr id="22" name="Text 20"/>
           <p:cNvSpPr/>
           <p:nvPr/>
         </p:nvSpPr>
@@ -2455,7 +2555,7 @@
       </p:sp>
       <p:sp>
         <p:nvSpPr>
-          <p:cNvPr id="22" name="Text 20"/>
+          <p:cNvPr id="23" name="Text 21"/>
           <p:cNvSpPr/>
           <p:nvPr/>
         </p:nvSpPr>
@@ -2494,7 +2594,7 @@
       </p:sp>
       <p:sp>
         <p:nvSpPr>
-          <p:cNvPr id="23" name="Text 21"/>
+          <p:cNvPr id="24" name="Text 22"/>
           <p:cNvSpPr/>
           <p:nvPr/>
         </p:nvSpPr>
@@ -2564,6 +2664,31 @@
         </p:nvSpPr>
         <p:spPr>
           <a:xfrm>
+            <a:off x="0" y="0"/>
+            <a:ext cx="12191695" cy="6858000"/>
+          </a:xfrm>
+          <a:prstGeom prst="rect">
+            <a:avLst/>
+          </a:prstGeom>
+          <a:solidFill>
+            <a:srgbClr val="0F172A"/>
+          </a:solidFill>
+          <a:ln w="12700">
+            <a:solidFill>
+              <a:srgbClr val="0F172A"/>
+            </a:solidFill>
+            <a:prstDash val="solid"/>
+          </a:ln>
+        </p:spPr>
+      </p:sp>
+      <p:sp>
+        <p:nvSpPr>
+          <p:cNvPr id="3" name="Shape 1"/>
+          <p:cNvSpPr/>
+          <p:nvPr/>
+        </p:nvSpPr>
+        <p:spPr>
+          <a:xfrm>
             <a:off x="457200" y="640080"/>
             <a:ext cx="201168" cy="201168"/>
           </a:xfrm>
@@ -2583,7 +2708,7 @@
       </p:sp>
       <p:sp>
         <p:nvSpPr>
-          <p:cNvPr id="3" name="Text 1"/>
+          <p:cNvPr id="4" name="Text 2"/>
           <p:cNvSpPr/>
           <p:nvPr/>
         </p:nvSpPr>
@@ -2622,7 +2747,7 @@
       </p:sp>
       <p:sp>
         <p:nvSpPr>
-          <p:cNvPr id="4" name="Text 2"/>
+          <p:cNvPr id="5" name="Text 3"/>
           <p:cNvSpPr/>
           <p:nvPr/>
         </p:nvSpPr>
@@ -4062,7 +4187,7 @@
       </p:graphicFrame>
       <p:sp>
         <p:nvSpPr>
-          <p:cNvPr id="6" name="Shape 3"/>
+          <p:cNvPr id="7" name="Shape 4"/>
           <p:cNvSpPr/>
           <p:nvPr/>
         </p:nvSpPr>
@@ -4087,7 +4212,7 @@
       </p:sp>
       <p:sp>
         <p:nvSpPr>
-          <p:cNvPr id="7" name="Text 4"/>
+          <p:cNvPr id="8" name="Text 5"/>
           <p:cNvSpPr/>
           <p:nvPr/>
         </p:nvSpPr>
@@ -4126,7 +4251,7 @@
       </p:sp>
       <p:sp>
         <p:nvSpPr>
-          <p:cNvPr id="8" name="Text 5"/>
+          <p:cNvPr id="9" name="Text 6"/>
           <p:cNvSpPr/>
           <p:nvPr/>
         </p:nvSpPr>
@@ -4165,7 +4290,7 @@
       </p:sp>
       <p:sp>
         <p:nvSpPr>
-          <p:cNvPr id="9" name="Shape 6"/>
+          <p:cNvPr id="10" name="Shape 7"/>
           <p:cNvSpPr/>
           <p:nvPr/>
         </p:nvSpPr>
@@ -4190,7 +4315,7 @@
       </p:sp>
       <p:sp>
         <p:nvSpPr>
-          <p:cNvPr id="10" name="Text 7"/>
+          <p:cNvPr id="11" name="Text 8"/>
           <p:cNvSpPr/>
           <p:nvPr/>
         </p:nvSpPr>
@@ -4229,7 +4354,7 @@
       </p:sp>
       <p:sp>
         <p:nvSpPr>
-          <p:cNvPr id="11" name="Text 8"/>
+          <p:cNvPr id="12" name="Text 9"/>
           <p:cNvSpPr/>
           <p:nvPr/>
         </p:nvSpPr>
@@ -4268,7 +4393,7 @@
       </p:sp>
       <p:sp>
         <p:nvSpPr>
-          <p:cNvPr id="12" name="Text 9"/>
+          <p:cNvPr id="13" name="Text 10"/>
           <p:cNvSpPr/>
           <p:nvPr/>
         </p:nvSpPr>
@@ -4338,6 +4463,31 @@
         </p:nvSpPr>
         <p:spPr>
           <a:xfrm>
+            <a:off x="0" y="0"/>
+            <a:ext cx="12191695" cy="6858000"/>
+          </a:xfrm>
+          <a:prstGeom prst="rect">
+            <a:avLst/>
+          </a:prstGeom>
+          <a:solidFill>
+            <a:srgbClr val="0F172A"/>
+          </a:solidFill>
+          <a:ln w="12700">
+            <a:solidFill>
+              <a:srgbClr val="0F172A"/>
+            </a:solidFill>
+            <a:prstDash val="solid"/>
+          </a:ln>
+        </p:spPr>
+      </p:sp>
+      <p:sp>
+        <p:nvSpPr>
+          <p:cNvPr id="3" name="Shape 1"/>
+          <p:cNvSpPr/>
+          <p:nvPr/>
+        </p:nvSpPr>
+        <p:spPr>
+          <a:xfrm>
             <a:off x="457200" y="640080"/>
             <a:ext cx="201168" cy="201168"/>
           </a:xfrm>
@@ -4357,7 +4507,7 @@
       </p:sp>
       <p:sp>
         <p:nvSpPr>
-          <p:cNvPr id="3" name="Text 1"/>
+          <p:cNvPr id="4" name="Text 2"/>
           <p:cNvSpPr/>
           <p:nvPr/>
         </p:nvSpPr>
@@ -4396,7 +4546,7 @@
       </p:sp>
       <p:sp>
         <p:nvSpPr>
-          <p:cNvPr id="4" name="Text 2"/>
+          <p:cNvPr id="5" name="Text 3"/>
           <p:cNvSpPr/>
           <p:nvPr/>
         </p:nvSpPr>
@@ -4435,7 +4585,7 @@
       </p:sp>
       <p:sp>
         <p:nvSpPr>
-          <p:cNvPr id="5" name="Shape 3"/>
+          <p:cNvPr id="6" name="Shape 4"/>
           <p:cNvSpPr/>
           <p:nvPr/>
         </p:nvSpPr>
@@ -4460,7 +4610,7 @@
       </p:sp>
       <p:sp>
         <p:nvSpPr>
-          <p:cNvPr id="6" name="Shape 4"/>
+          <p:cNvPr id="7" name="Shape 5"/>
           <p:cNvSpPr/>
           <p:nvPr/>
         </p:nvSpPr>
@@ -4485,7 +4635,7 @@
       </p:sp>
       <p:sp>
         <p:nvSpPr>
-          <p:cNvPr id="7" name="Text 5"/>
+          <p:cNvPr id="8" name="Text 6"/>
           <p:cNvSpPr/>
           <p:nvPr/>
         </p:nvSpPr>
@@ -4524,7 +4674,7 @@
       </p:sp>
       <p:sp>
         <p:nvSpPr>
-          <p:cNvPr id="8" name="Text 6"/>
+          <p:cNvPr id="9" name="Text 7"/>
           <p:cNvSpPr/>
           <p:nvPr/>
         </p:nvSpPr>
@@ -4563,7 +4713,7 @@
       </p:sp>
       <p:sp>
         <p:nvSpPr>
-          <p:cNvPr id="9" name="Text 7"/>
+          <p:cNvPr id="10" name="Text 8"/>
           <p:cNvSpPr/>
           <p:nvPr/>
         </p:nvSpPr>
@@ -4602,7 +4752,7 @@
       </p:sp>
       <p:sp>
         <p:nvSpPr>
-          <p:cNvPr id="10" name="Shape 8"/>
+          <p:cNvPr id="11" name="Shape 9"/>
           <p:cNvSpPr/>
           <p:nvPr/>
         </p:nvSpPr>
@@ -4625,7 +4775,7 @@
       </p:sp>
       <p:sp>
         <p:nvSpPr>
-          <p:cNvPr id="11" name="Text 9"/>
+          <p:cNvPr id="12" name="Text 10"/>
           <p:cNvSpPr/>
           <p:nvPr/>
         </p:nvSpPr>
@@ -4715,7 +4865,7 @@
       </p:sp>
       <p:sp>
         <p:nvSpPr>
-          <p:cNvPr id="12" name="Shape 10"/>
+          <p:cNvPr id="13" name="Shape 11"/>
           <p:cNvSpPr/>
           <p:nvPr/>
         </p:nvSpPr>
@@ -4740,7 +4890,7 @@
       </p:sp>
       <p:sp>
         <p:nvSpPr>
-          <p:cNvPr id="13" name="Text 11"/>
+          <p:cNvPr id="14" name="Text 12"/>
           <p:cNvSpPr/>
           <p:nvPr/>
         </p:nvSpPr>
@@ -4779,7 +4929,7 @@
       </p:sp>
       <p:sp>
         <p:nvSpPr>
-          <p:cNvPr id="14" name="Shape 12"/>
+          <p:cNvPr id="15" name="Shape 13"/>
           <p:cNvSpPr/>
           <p:nvPr/>
         </p:nvSpPr>
@@ -4804,7 +4954,7 @@
       </p:sp>
       <p:sp>
         <p:nvSpPr>
-          <p:cNvPr id="15" name="Shape 13"/>
+          <p:cNvPr id="16" name="Shape 14"/>
           <p:cNvSpPr/>
           <p:nvPr/>
         </p:nvSpPr>
@@ -4829,7 +4979,7 @@
       </p:sp>
       <p:sp>
         <p:nvSpPr>
-          <p:cNvPr id="16" name="Text 14"/>
+          <p:cNvPr id="17" name="Text 15"/>
           <p:cNvSpPr/>
           <p:nvPr/>
         </p:nvSpPr>
@@ -4868,7 +5018,7 @@
       </p:sp>
       <p:sp>
         <p:nvSpPr>
-          <p:cNvPr id="17" name="Text 15"/>
+          <p:cNvPr id="18" name="Text 16"/>
           <p:cNvSpPr/>
           <p:nvPr/>
         </p:nvSpPr>
@@ -4907,7 +5057,7 @@
       </p:sp>
       <p:sp>
         <p:nvSpPr>
-          <p:cNvPr id="18" name="Text 16"/>
+          <p:cNvPr id="19" name="Text 17"/>
           <p:cNvSpPr/>
           <p:nvPr/>
         </p:nvSpPr>
@@ -4946,7 +5096,7 @@
       </p:sp>
       <p:sp>
         <p:nvSpPr>
-          <p:cNvPr id="19" name="Shape 17"/>
+          <p:cNvPr id="20" name="Shape 18"/>
           <p:cNvSpPr/>
           <p:nvPr/>
         </p:nvSpPr>
@@ -4969,7 +5119,7 @@
       </p:sp>
       <p:sp>
         <p:nvSpPr>
-          <p:cNvPr id="20" name="Text 18"/>
+          <p:cNvPr id="21" name="Text 19"/>
           <p:cNvSpPr/>
           <p:nvPr/>
         </p:nvSpPr>
@@ -5076,7 +5226,7 @@
       </p:sp>
       <p:sp>
         <p:nvSpPr>
-          <p:cNvPr id="21" name="Shape 19"/>
+          <p:cNvPr id="22" name="Shape 20"/>
           <p:cNvSpPr/>
           <p:nvPr/>
         </p:nvSpPr>
@@ -5101,7 +5251,7 @@
       </p:sp>
       <p:sp>
         <p:nvSpPr>
-          <p:cNvPr id="22" name="Text 20"/>
+          <p:cNvPr id="23" name="Text 21"/>
           <p:cNvSpPr/>
           <p:nvPr/>
         </p:nvSpPr>
@@ -5140,7 +5290,7 @@
       </p:sp>
       <p:sp>
         <p:nvSpPr>
-          <p:cNvPr id="23" name="Shape 21"/>
+          <p:cNvPr id="24" name="Shape 22"/>
           <p:cNvSpPr/>
           <p:nvPr/>
         </p:nvSpPr>
@@ -5165,7 +5315,7 @@
       </p:sp>
       <p:sp>
         <p:nvSpPr>
-          <p:cNvPr id="24" name="Shape 22"/>
+          <p:cNvPr id="25" name="Shape 23"/>
           <p:cNvSpPr/>
           <p:nvPr/>
         </p:nvSpPr>
@@ -5190,7 +5340,7 @@
       </p:sp>
       <p:sp>
         <p:nvSpPr>
-          <p:cNvPr id="25" name="Text 23"/>
+          <p:cNvPr id="26" name="Text 24"/>
           <p:cNvSpPr/>
           <p:nvPr/>
         </p:nvSpPr>
@@ -5229,7 +5379,7 @@
       </p:sp>
       <p:sp>
         <p:nvSpPr>
-          <p:cNvPr id="26" name="Text 24"/>
+          <p:cNvPr id="27" name="Text 25"/>
           <p:cNvSpPr/>
           <p:nvPr/>
         </p:nvSpPr>
@@ -5268,7 +5418,7 @@
       </p:sp>
       <p:sp>
         <p:nvSpPr>
-          <p:cNvPr id="27" name="Text 25"/>
+          <p:cNvPr id="28" name="Text 26"/>
           <p:cNvSpPr/>
           <p:nvPr/>
         </p:nvSpPr>
@@ -5307,7 +5457,7 @@
       </p:sp>
       <p:sp>
         <p:nvSpPr>
-          <p:cNvPr id="28" name="Shape 26"/>
+          <p:cNvPr id="29" name="Shape 27"/>
           <p:cNvSpPr/>
           <p:nvPr/>
         </p:nvSpPr>
@@ -5330,7 +5480,7 @@
       </p:sp>
       <p:sp>
         <p:nvSpPr>
-          <p:cNvPr id="29" name="Text 27"/>
+          <p:cNvPr id="30" name="Text 28"/>
           <p:cNvSpPr/>
           <p:nvPr/>
         </p:nvSpPr>
@@ -5437,7 +5587,7 @@
       </p:sp>
       <p:sp>
         <p:nvSpPr>
-          <p:cNvPr id="30" name="Shape 28"/>
+          <p:cNvPr id="31" name="Shape 29"/>
           <p:cNvSpPr/>
           <p:nvPr/>
         </p:nvSpPr>
@@ -5462,7 +5612,7 @@
       </p:sp>
       <p:sp>
         <p:nvSpPr>
-          <p:cNvPr id="31" name="Text 29"/>
+          <p:cNvPr id="32" name="Text 30"/>
           <p:cNvSpPr/>
           <p:nvPr/>
         </p:nvSpPr>
@@ -5501,7 +5651,7 @@
       </p:sp>
       <p:sp>
         <p:nvSpPr>
-          <p:cNvPr id="32" name="Text 30"/>
+          <p:cNvPr id="33" name="Text 31"/>
           <p:cNvSpPr/>
           <p:nvPr/>
         </p:nvSpPr>
@@ -5571,6 +5721,31 @@
         </p:nvSpPr>
         <p:spPr>
           <a:xfrm>
+            <a:off x="0" y="0"/>
+            <a:ext cx="12191695" cy="6858000"/>
+          </a:xfrm>
+          <a:prstGeom prst="rect">
+            <a:avLst/>
+          </a:prstGeom>
+          <a:solidFill>
+            <a:srgbClr val="0F172A"/>
+          </a:solidFill>
+          <a:ln w="12700">
+            <a:solidFill>
+              <a:srgbClr val="0F172A"/>
+            </a:solidFill>
+            <a:prstDash val="solid"/>
+          </a:ln>
+        </p:spPr>
+      </p:sp>
+      <p:sp>
+        <p:nvSpPr>
+          <p:cNvPr id="3" name="Shape 1"/>
+          <p:cNvSpPr/>
+          <p:nvPr/>
+        </p:nvSpPr>
+        <p:spPr>
+          <a:xfrm>
             <a:off x="457200" y="640080"/>
             <a:ext cx="201168" cy="201168"/>
           </a:xfrm>
@@ -5590,7 +5765,7 @@
       </p:sp>
       <p:sp>
         <p:nvSpPr>
-          <p:cNvPr id="3" name="Text 1"/>
+          <p:cNvPr id="4" name="Text 2"/>
           <p:cNvSpPr/>
           <p:nvPr/>
         </p:nvSpPr>
@@ -5629,7 +5804,7 @@
       </p:sp>
       <p:sp>
         <p:nvSpPr>
-          <p:cNvPr id="4" name="Text 2"/>
+          <p:cNvPr id="5" name="Text 3"/>
           <p:cNvSpPr/>
           <p:nvPr/>
         </p:nvSpPr>
@@ -5668,7 +5843,7 @@
       </p:sp>
       <p:sp>
         <p:nvSpPr>
-          <p:cNvPr id="5" name="Shape 3"/>
+          <p:cNvPr id="6" name="Shape 4"/>
           <p:cNvSpPr/>
           <p:nvPr/>
         </p:nvSpPr>
@@ -5693,7 +5868,7 @@
       </p:sp>
       <p:sp>
         <p:nvSpPr>
-          <p:cNvPr id="6" name="Shape 4"/>
+          <p:cNvPr id="7" name="Shape 5"/>
           <p:cNvSpPr/>
           <p:nvPr/>
         </p:nvSpPr>
@@ -5718,7 +5893,7 @@
       </p:sp>
       <p:sp>
         <p:nvSpPr>
-          <p:cNvPr id="7" name="Text 5"/>
+          <p:cNvPr id="8" name="Text 6"/>
           <p:cNvSpPr/>
           <p:nvPr/>
         </p:nvSpPr>
@@ -5757,7 +5932,7 @@
       </p:sp>
       <p:sp>
         <p:nvSpPr>
-          <p:cNvPr id="8" name="Text 6"/>
+          <p:cNvPr id="9" name="Text 7"/>
           <p:cNvSpPr/>
           <p:nvPr/>
         </p:nvSpPr>
@@ -5796,7 +5971,7 @@
       </p:sp>
       <p:sp>
         <p:nvSpPr>
-          <p:cNvPr id="9" name="Text 7"/>
+          <p:cNvPr id="10" name="Text 8"/>
           <p:cNvSpPr/>
           <p:nvPr/>
         </p:nvSpPr>
@@ -5835,7 +6010,7 @@
       </p:sp>
       <p:sp>
         <p:nvSpPr>
-          <p:cNvPr id="10" name="Text 8"/>
+          <p:cNvPr id="11" name="Text 9"/>
           <p:cNvSpPr/>
           <p:nvPr/>
         </p:nvSpPr>
@@ -5874,7 +6049,7 @@
       </p:sp>
       <p:sp>
         <p:nvSpPr>
-          <p:cNvPr id="11" name="Shape 9"/>
+          <p:cNvPr id="12" name="Shape 10"/>
           <p:cNvSpPr/>
           <p:nvPr/>
         </p:nvSpPr>
@@ -5899,7 +6074,7 @@
       </p:sp>
       <p:sp>
         <p:nvSpPr>
-          <p:cNvPr id="12" name="Shape 10"/>
+          <p:cNvPr id="13" name="Shape 11"/>
           <p:cNvSpPr/>
           <p:nvPr/>
         </p:nvSpPr>
@@ -5924,7 +6099,7 @@
       </p:sp>
       <p:sp>
         <p:nvSpPr>
-          <p:cNvPr id="13" name="Text 11"/>
+          <p:cNvPr id="14" name="Text 12"/>
           <p:cNvSpPr/>
           <p:nvPr/>
         </p:nvSpPr>
@@ -5963,7 +6138,7 @@
       </p:sp>
       <p:sp>
         <p:nvSpPr>
-          <p:cNvPr id="14" name="Text 12"/>
+          <p:cNvPr id="15" name="Text 13"/>
           <p:cNvSpPr/>
           <p:nvPr/>
         </p:nvSpPr>
@@ -6002,7 +6177,7 @@
       </p:sp>
       <p:sp>
         <p:nvSpPr>
-          <p:cNvPr id="15" name="Text 13"/>
+          <p:cNvPr id="16" name="Text 14"/>
           <p:cNvSpPr/>
           <p:nvPr/>
         </p:nvSpPr>
@@ -6041,7 +6216,7 @@
       </p:sp>
       <p:sp>
         <p:nvSpPr>
-          <p:cNvPr id="16" name="Text 14"/>
+          <p:cNvPr id="17" name="Text 15"/>
           <p:cNvSpPr/>
           <p:nvPr/>
         </p:nvSpPr>
@@ -6080,7 +6255,7 @@
       </p:sp>
       <p:sp>
         <p:nvSpPr>
-          <p:cNvPr id="17" name="Shape 15"/>
+          <p:cNvPr id="18" name="Shape 16"/>
           <p:cNvSpPr/>
           <p:nvPr/>
         </p:nvSpPr>
@@ -6105,7 +6280,7 @@
       </p:sp>
       <p:sp>
         <p:nvSpPr>
-          <p:cNvPr id="18" name="Shape 16"/>
+          <p:cNvPr id="19" name="Shape 17"/>
           <p:cNvSpPr/>
           <p:nvPr/>
         </p:nvSpPr>
@@ -6130,7 +6305,7 @@
       </p:sp>
       <p:sp>
         <p:nvSpPr>
-          <p:cNvPr id="19" name="Text 17"/>
+          <p:cNvPr id="20" name="Text 18"/>
           <p:cNvSpPr/>
           <p:nvPr/>
         </p:nvSpPr>
@@ -6169,7 +6344,7 @@
       </p:sp>
       <p:sp>
         <p:nvSpPr>
-          <p:cNvPr id="20" name="Text 18"/>
+          <p:cNvPr id="21" name="Text 19"/>
           <p:cNvSpPr/>
           <p:nvPr/>
         </p:nvSpPr>
@@ -6208,7 +6383,7 @@
       </p:sp>
       <p:sp>
         <p:nvSpPr>
-          <p:cNvPr id="21" name="Text 19"/>
+          <p:cNvPr id="22" name="Text 20"/>
           <p:cNvSpPr/>
           <p:nvPr/>
         </p:nvSpPr>
@@ -6247,7 +6422,7 @@
       </p:sp>
       <p:sp>
         <p:nvSpPr>
-          <p:cNvPr id="22" name="Text 20"/>
+          <p:cNvPr id="23" name="Text 21"/>
           <p:cNvSpPr/>
           <p:nvPr/>
         </p:nvSpPr>
@@ -6286,7 +6461,7 @@
       </p:sp>
       <p:sp>
         <p:nvSpPr>
-          <p:cNvPr id="23" name="Text 21"/>
+          <p:cNvPr id="24" name="Text 22"/>
           <p:cNvSpPr/>
           <p:nvPr/>
         </p:nvSpPr>
@@ -6356,6 +6531,31 @@
         </p:nvSpPr>
         <p:spPr>
           <a:xfrm>
+            <a:off x="0" y="0"/>
+            <a:ext cx="12191695" cy="6858000"/>
+          </a:xfrm>
+          <a:prstGeom prst="rect">
+            <a:avLst/>
+          </a:prstGeom>
+          <a:solidFill>
+            <a:srgbClr val="0F172A"/>
+          </a:solidFill>
+          <a:ln w="12700">
+            <a:solidFill>
+              <a:srgbClr val="0F172A"/>
+            </a:solidFill>
+            <a:prstDash val="solid"/>
+          </a:ln>
+        </p:spPr>
+      </p:sp>
+      <p:sp>
+        <p:nvSpPr>
+          <p:cNvPr id="3" name="Shape 1"/>
+          <p:cNvSpPr/>
+          <p:nvPr/>
+        </p:nvSpPr>
+        <p:spPr>
+          <a:xfrm>
             <a:off x="457200" y="640080"/>
             <a:ext cx="201168" cy="201168"/>
           </a:xfrm>
@@ -6375,7 +6575,7 @@
       </p:sp>
       <p:sp>
         <p:nvSpPr>
-          <p:cNvPr id="3" name="Text 1"/>
+          <p:cNvPr id="4" name="Text 2"/>
           <p:cNvSpPr/>
           <p:nvPr/>
         </p:nvSpPr>
@@ -6414,7 +6614,7 @@
       </p:sp>
       <p:sp>
         <p:nvSpPr>
-          <p:cNvPr id="4" name="Text 2"/>
+          <p:cNvPr id="5" name="Text 3"/>
           <p:cNvSpPr/>
           <p:nvPr/>
         </p:nvSpPr>
@@ -6453,7 +6653,7 @@
       </p:sp>
       <p:sp>
         <p:nvSpPr>
-          <p:cNvPr id="5" name="Shape 3"/>
+          <p:cNvPr id="6" name="Shape 4"/>
           <p:cNvSpPr/>
           <p:nvPr/>
         </p:nvSpPr>
@@ -6478,7 +6678,7 @@
       </p:sp>
       <p:sp>
         <p:nvSpPr>
-          <p:cNvPr id="6" name="Shape 4"/>
+          <p:cNvPr id="7" name="Shape 5"/>
           <p:cNvSpPr/>
           <p:nvPr/>
         </p:nvSpPr>
@@ -6503,7 +6703,7 @@
       </p:sp>
       <p:sp>
         <p:nvSpPr>
-          <p:cNvPr id="7" name="Text 5"/>
+          <p:cNvPr id="8" name="Text 6"/>
           <p:cNvSpPr/>
           <p:nvPr/>
         </p:nvSpPr>
@@ -6542,7 +6742,7 @@
       </p:sp>
       <p:sp>
         <p:nvSpPr>
-          <p:cNvPr id="8" name="Text 6"/>
+          <p:cNvPr id="9" name="Text 7"/>
           <p:cNvSpPr/>
           <p:nvPr/>
         </p:nvSpPr>
@@ -6581,7 +6781,7 @@
       </p:sp>
       <p:sp>
         <p:nvSpPr>
-          <p:cNvPr id="9" name="Text 7"/>
+          <p:cNvPr id="10" name="Text 8"/>
           <p:cNvSpPr/>
           <p:nvPr/>
         </p:nvSpPr>
@@ -6634,7 +6834,7 @@
       </p:sp>
       <p:sp>
         <p:nvSpPr>
-          <p:cNvPr id="10" name="Text 8"/>
+          <p:cNvPr id="11" name="Text 9"/>
           <p:cNvSpPr/>
           <p:nvPr/>
         </p:nvSpPr>
@@ -6687,7 +6887,7 @@
       </p:sp>
       <p:sp>
         <p:nvSpPr>
-          <p:cNvPr id="11" name="Shape 9"/>
+          <p:cNvPr id="12" name="Shape 10"/>
           <p:cNvSpPr/>
           <p:nvPr/>
         </p:nvSpPr>
@@ -6712,7 +6912,7 @@
       </p:sp>
       <p:sp>
         <p:nvSpPr>
-          <p:cNvPr id="12" name="Shape 10"/>
+          <p:cNvPr id="13" name="Shape 11"/>
           <p:cNvSpPr/>
           <p:nvPr/>
         </p:nvSpPr>
@@ -6737,7 +6937,7 @@
       </p:sp>
       <p:sp>
         <p:nvSpPr>
-          <p:cNvPr id="13" name="Text 11"/>
+          <p:cNvPr id="14" name="Text 12"/>
           <p:cNvSpPr/>
           <p:nvPr/>
         </p:nvSpPr>
@@ -6776,7 +6976,7 @@
       </p:sp>
       <p:sp>
         <p:nvSpPr>
-          <p:cNvPr id="14" name="Text 12"/>
+          <p:cNvPr id="15" name="Text 13"/>
           <p:cNvSpPr/>
           <p:nvPr/>
         </p:nvSpPr>
@@ -6815,7 +7015,7 @@
       </p:sp>
       <p:sp>
         <p:nvSpPr>
-          <p:cNvPr id="15" name="Text 13"/>
+          <p:cNvPr id="16" name="Text 14"/>
           <p:cNvSpPr/>
           <p:nvPr/>
         </p:nvSpPr>
@@ -6868,7 +7068,7 @@
       </p:sp>
       <p:sp>
         <p:nvSpPr>
-          <p:cNvPr id="16" name="Text 14"/>
+          <p:cNvPr id="17" name="Text 15"/>
           <p:cNvSpPr/>
           <p:nvPr/>
         </p:nvSpPr>
@@ -6921,7 +7121,7 @@
       </p:sp>
       <p:sp>
         <p:nvSpPr>
-          <p:cNvPr id="17" name="Shape 15"/>
+          <p:cNvPr id="18" name="Shape 16"/>
           <p:cNvSpPr/>
           <p:nvPr/>
         </p:nvSpPr>
@@ -6946,7 +7146,7 @@
       </p:sp>
       <p:sp>
         <p:nvSpPr>
-          <p:cNvPr id="18" name="Shape 16"/>
+          <p:cNvPr id="19" name="Shape 17"/>
           <p:cNvSpPr/>
           <p:nvPr/>
         </p:nvSpPr>
@@ -6971,7 +7171,7 @@
       </p:sp>
       <p:sp>
         <p:nvSpPr>
-          <p:cNvPr id="19" name="Text 17"/>
+          <p:cNvPr id="20" name="Text 18"/>
           <p:cNvSpPr/>
           <p:nvPr/>
         </p:nvSpPr>
@@ -7010,7 +7210,7 @@
       </p:sp>
       <p:sp>
         <p:nvSpPr>
-          <p:cNvPr id="20" name="Text 18"/>
+          <p:cNvPr id="21" name="Text 19"/>
           <p:cNvSpPr/>
           <p:nvPr/>
         </p:nvSpPr>
@@ -7049,7 +7249,7 @@
       </p:sp>
       <p:sp>
         <p:nvSpPr>
-          <p:cNvPr id="21" name="Text 19"/>
+          <p:cNvPr id="22" name="Text 20"/>
           <p:cNvSpPr/>
           <p:nvPr/>
         </p:nvSpPr>
@@ -7102,7 +7302,7 @@
       </p:sp>
       <p:sp>
         <p:nvSpPr>
-          <p:cNvPr id="22" name="Text 20"/>
+          <p:cNvPr id="23" name="Text 21"/>
           <p:cNvSpPr/>
           <p:nvPr/>
         </p:nvSpPr>
@@ -7155,7 +7355,7 @@
       </p:sp>
       <p:sp>
         <p:nvSpPr>
-          <p:cNvPr id="23" name="Text 21"/>
+          <p:cNvPr id="24" name="Text 22"/>
           <p:cNvSpPr/>
           <p:nvPr/>
         </p:nvSpPr>
@@ -7194,7 +7394,7 @@
       </p:sp>
       <p:sp>
         <p:nvSpPr>
-          <p:cNvPr id="24" name="Text 22"/>
+          <p:cNvPr id="25" name="Text 23"/>
           <p:cNvSpPr/>
           <p:nvPr/>
         </p:nvSpPr>
